--- a/fdi_pitch/India_Trade_FDI_Pitch_Deck.pptx
+++ b/fdi_pitch/India_Trade_FDI_Pitch_Deck.pptx
@@ -17,6 +17,8 @@
     <p:sldId id="265" r:id="rId16"/>
     <p:sldId id="266" r:id="rId17"/>
     <p:sldId id="267" r:id="rId18"/>
+    <p:sldId id="268" r:id="rId19"/>
+    <p:sldId id="269" r:id="rId20"/>
   </p:sldIdLst>
   <p:sldSz cx="12192000" cy="6858000" type="screen4x3"/>
   <p:notesSz cx="6858000" cy="9144000"/>
@@ -3228,6 +3230,90 @@
       <p:pic>
         <p:nvPicPr>
           <p:cNvPr id="2" name="Picture 1" descr="slide_12.png"/>
+          <p:cNvPicPr>
+            <a:picLocks noChangeAspect="1"/>
+          </p:cNvPicPr>
+          <p:nvPr/>
+        </p:nvPicPr>
+        <p:blipFill>
+          <a:blip r:embed="rId2"/>
+          <a:stretch>
+            <a:fillRect/>
+          </a:stretch>
+        </p:blipFill>
+        <p:spPr>
+          <a:xfrm>
+            <a:off x="0" y="0"/>
+            <a:ext cx="12192000" cy="6858000"/>
+          </a:xfrm>
+          <a:prstGeom prst="rect">
+            <a:avLst/>
+          </a:prstGeom>
+        </p:spPr>
+      </p:pic>
+    </p:spTree>
+  </p:cSld>
+  <p:clrMapOvr>
+    <a:masterClrMapping/>
+  </p:clrMapOvr>
+</p:sld>
+</file>
+
+<file path=ppt/slides/slide13.xml><?xml version="1.0" encoding="utf-8"?>
+<p:sld xmlns:a="http://schemas.openxmlformats.org/drawingml/2006/main" xmlns:p="http://schemas.openxmlformats.org/presentationml/2006/main" xmlns:r="http://schemas.openxmlformats.org/officeDocument/2006/relationships">
+  <p:cSld>
+    <p:spTree>
+      <p:nvGrpSpPr>
+        <p:cNvPr id="1" name=""/>
+        <p:cNvGrpSpPr/>
+        <p:nvPr/>
+      </p:nvGrpSpPr>
+      <p:grpSpPr/>
+      <p:pic>
+        <p:nvPicPr>
+          <p:cNvPr id="2" name="Picture 1" descr="slide_13.png"/>
+          <p:cNvPicPr>
+            <a:picLocks noChangeAspect="1"/>
+          </p:cNvPicPr>
+          <p:nvPr/>
+        </p:nvPicPr>
+        <p:blipFill>
+          <a:blip r:embed="rId2"/>
+          <a:stretch>
+            <a:fillRect/>
+          </a:stretch>
+        </p:blipFill>
+        <p:spPr>
+          <a:xfrm>
+            <a:off x="0" y="0"/>
+            <a:ext cx="12192000" cy="6858000"/>
+          </a:xfrm>
+          <a:prstGeom prst="rect">
+            <a:avLst/>
+          </a:prstGeom>
+        </p:spPr>
+      </p:pic>
+    </p:spTree>
+  </p:cSld>
+  <p:clrMapOvr>
+    <a:masterClrMapping/>
+  </p:clrMapOvr>
+</p:sld>
+</file>
+
+<file path=ppt/slides/slide14.xml><?xml version="1.0" encoding="utf-8"?>
+<p:sld xmlns:a="http://schemas.openxmlformats.org/drawingml/2006/main" xmlns:p="http://schemas.openxmlformats.org/presentationml/2006/main" xmlns:r="http://schemas.openxmlformats.org/officeDocument/2006/relationships">
+  <p:cSld>
+    <p:spTree>
+      <p:nvGrpSpPr>
+        <p:cNvPr id="1" name=""/>
+        <p:cNvGrpSpPr/>
+        <p:nvPr/>
+      </p:nvGrpSpPr>
+      <p:grpSpPr/>
+      <p:pic>
+        <p:nvPicPr>
+          <p:cNvPr id="2" name="Picture 1" descr="slide_14.png"/>
           <p:cNvPicPr>
             <a:picLocks noChangeAspect="1"/>
           </p:cNvPicPr>

--- a/fdi_pitch/India_Trade_FDI_Pitch_Deck.pptx
+++ b/fdi_pitch/India_Trade_FDI_Pitch_Deck.pptx
@@ -19,6 +19,10 @@
     <p:sldId id="267" r:id="rId18"/>
     <p:sldId id="268" r:id="rId19"/>
     <p:sldId id="269" r:id="rId20"/>
+    <p:sldId id="270" r:id="rId21"/>
+    <p:sldId id="271" r:id="rId22"/>
+    <p:sldId id="272" r:id="rId23"/>
+    <p:sldId id="273" r:id="rId24"/>
   </p:sldIdLst>
   <p:sldSz cx="12192000" cy="6858000" type="screen4x3"/>
   <p:notesSz cx="6858000" cy="9144000"/>
@@ -3314,6 +3318,174 @@
       <p:pic>
         <p:nvPicPr>
           <p:cNvPr id="2" name="Picture 1" descr="slide_14.png"/>
+          <p:cNvPicPr>
+            <a:picLocks noChangeAspect="1"/>
+          </p:cNvPicPr>
+          <p:nvPr/>
+        </p:nvPicPr>
+        <p:blipFill>
+          <a:blip r:embed="rId2"/>
+          <a:stretch>
+            <a:fillRect/>
+          </a:stretch>
+        </p:blipFill>
+        <p:spPr>
+          <a:xfrm>
+            <a:off x="0" y="0"/>
+            <a:ext cx="12192000" cy="6858000"/>
+          </a:xfrm>
+          <a:prstGeom prst="rect">
+            <a:avLst/>
+          </a:prstGeom>
+        </p:spPr>
+      </p:pic>
+    </p:spTree>
+  </p:cSld>
+  <p:clrMapOvr>
+    <a:masterClrMapping/>
+  </p:clrMapOvr>
+</p:sld>
+</file>
+
+<file path=ppt/slides/slide15.xml><?xml version="1.0" encoding="utf-8"?>
+<p:sld xmlns:a="http://schemas.openxmlformats.org/drawingml/2006/main" xmlns:p="http://schemas.openxmlformats.org/presentationml/2006/main" xmlns:r="http://schemas.openxmlformats.org/officeDocument/2006/relationships">
+  <p:cSld>
+    <p:spTree>
+      <p:nvGrpSpPr>
+        <p:cNvPr id="1" name=""/>
+        <p:cNvGrpSpPr/>
+        <p:nvPr/>
+      </p:nvGrpSpPr>
+      <p:grpSpPr/>
+      <p:pic>
+        <p:nvPicPr>
+          <p:cNvPr id="2" name="Picture 1" descr="slide_15.png"/>
+          <p:cNvPicPr>
+            <a:picLocks noChangeAspect="1"/>
+          </p:cNvPicPr>
+          <p:nvPr/>
+        </p:nvPicPr>
+        <p:blipFill>
+          <a:blip r:embed="rId2"/>
+          <a:stretch>
+            <a:fillRect/>
+          </a:stretch>
+        </p:blipFill>
+        <p:spPr>
+          <a:xfrm>
+            <a:off x="0" y="0"/>
+            <a:ext cx="12192000" cy="6858000"/>
+          </a:xfrm>
+          <a:prstGeom prst="rect">
+            <a:avLst/>
+          </a:prstGeom>
+        </p:spPr>
+      </p:pic>
+    </p:spTree>
+  </p:cSld>
+  <p:clrMapOvr>
+    <a:masterClrMapping/>
+  </p:clrMapOvr>
+</p:sld>
+</file>
+
+<file path=ppt/slides/slide16.xml><?xml version="1.0" encoding="utf-8"?>
+<p:sld xmlns:a="http://schemas.openxmlformats.org/drawingml/2006/main" xmlns:p="http://schemas.openxmlformats.org/presentationml/2006/main" xmlns:r="http://schemas.openxmlformats.org/officeDocument/2006/relationships">
+  <p:cSld>
+    <p:spTree>
+      <p:nvGrpSpPr>
+        <p:cNvPr id="1" name=""/>
+        <p:cNvGrpSpPr/>
+        <p:nvPr/>
+      </p:nvGrpSpPr>
+      <p:grpSpPr/>
+      <p:pic>
+        <p:nvPicPr>
+          <p:cNvPr id="2" name="Picture 1" descr="slide_16.png"/>
+          <p:cNvPicPr>
+            <a:picLocks noChangeAspect="1"/>
+          </p:cNvPicPr>
+          <p:nvPr/>
+        </p:nvPicPr>
+        <p:blipFill>
+          <a:blip r:embed="rId2"/>
+          <a:stretch>
+            <a:fillRect/>
+          </a:stretch>
+        </p:blipFill>
+        <p:spPr>
+          <a:xfrm>
+            <a:off x="0" y="0"/>
+            <a:ext cx="12192000" cy="6858000"/>
+          </a:xfrm>
+          <a:prstGeom prst="rect">
+            <a:avLst/>
+          </a:prstGeom>
+        </p:spPr>
+      </p:pic>
+    </p:spTree>
+  </p:cSld>
+  <p:clrMapOvr>
+    <a:masterClrMapping/>
+  </p:clrMapOvr>
+</p:sld>
+</file>
+
+<file path=ppt/slides/slide17.xml><?xml version="1.0" encoding="utf-8"?>
+<p:sld xmlns:a="http://schemas.openxmlformats.org/drawingml/2006/main" xmlns:p="http://schemas.openxmlformats.org/presentationml/2006/main" xmlns:r="http://schemas.openxmlformats.org/officeDocument/2006/relationships">
+  <p:cSld>
+    <p:spTree>
+      <p:nvGrpSpPr>
+        <p:cNvPr id="1" name=""/>
+        <p:cNvGrpSpPr/>
+        <p:nvPr/>
+      </p:nvGrpSpPr>
+      <p:grpSpPr/>
+      <p:pic>
+        <p:nvPicPr>
+          <p:cNvPr id="2" name="Picture 1" descr="slide_17.png"/>
+          <p:cNvPicPr>
+            <a:picLocks noChangeAspect="1"/>
+          </p:cNvPicPr>
+          <p:nvPr/>
+        </p:nvPicPr>
+        <p:blipFill>
+          <a:blip r:embed="rId2"/>
+          <a:stretch>
+            <a:fillRect/>
+          </a:stretch>
+        </p:blipFill>
+        <p:spPr>
+          <a:xfrm>
+            <a:off x="0" y="0"/>
+            <a:ext cx="12192000" cy="6858000"/>
+          </a:xfrm>
+          <a:prstGeom prst="rect">
+            <a:avLst/>
+          </a:prstGeom>
+        </p:spPr>
+      </p:pic>
+    </p:spTree>
+  </p:cSld>
+  <p:clrMapOvr>
+    <a:masterClrMapping/>
+  </p:clrMapOvr>
+</p:sld>
+</file>
+
+<file path=ppt/slides/slide18.xml><?xml version="1.0" encoding="utf-8"?>
+<p:sld xmlns:a="http://schemas.openxmlformats.org/drawingml/2006/main" xmlns:p="http://schemas.openxmlformats.org/presentationml/2006/main" xmlns:r="http://schemas.openxmlformats.org/officeDocument/2006/relationships">
+  <p:cSld>
+    <p:spTree>
+      <p:nvGrpSpPr>
+        <p:cNvPr id="1" name=""/>
+        <p:cNvGrpSpPr/>
+        <p:nvPr/>
+      </p:nvGrpSpPr>
+      <p:grpSpPr/>
+      <p:pic>
+        <p:nvPicPr>
+          <p:cNvPr id="2" name="Picture 1" descr="slide_18.png"/>
           <p:cNvPicPr>
             <a:picLocks noChangeAspect="1"/>
           </p:cNvPicPr>

--- a/fdi_pitch/India_Trade_FDI_Pitch_Deck.pptx
+++ b/fdi_pitch/India_Trade_FDI_Pitch_Deck.pptx
@@ -23,6 +23,7 @@
     <p:sldId id="271" r:id="rId22"/>
     <p:sldId id="272" r:id="rId23"/>
     <p:sldId id="273" r:id="rId24"/>
+    <p:sldId id="274" r:id="rId25"/>
   </p:sldIdLst>
   <p:sldSz cx="12192000" cy="6858000" type="screen4x3"/>
   <p:notesSz cx="6858000" cy="9144000"/>
@@ -3515,6 +3516,48 @@
 </p:sld>
 </file>
 
+<file path=ppt/slides/slide19.xml><?xml version="1.0" encoding="utf-8"?>
+<p:sld xmlns:a="http://schemas.openxmlformats.org/drawingml/2006/main" xmlns:p="http://schemas.openxmlformats.org/presentationml/2006/main" xmlns:r="http://schemas.openxmlformats.org/officeDocument/2006/relationships">
+  <p:cSld>
+    <p:spTree>
+      <p:nvGrpSpPr>
+        <p:cNvPr id="1" name=""/>
+        <p:cNvGrpSpPr/>
+        <p:nvPr/>
+      </p:nvGrpSpPr>
+      <p:grpSpPr/>
+      <p:pic>
+        <p:nvPicPr>
+          <p:cNvPr id="2" name="Picture 1" descr="slide_19.png"/>
+          <p:cNvPicPr>
+            <a:picLocks noChangeAspect="1"/>
+          </p:cNvPicPr>
+          <p:nvPr/>
+        </p:nvPicPr>
+        <p:blipFill>
+          <a:blip r:embed="rId2"/>
+          <a:stretch>
+            <a:fillRect/>
+          </a:stretch>
+        </p:blipFill>
+        <p:spPr>
+          <a:xfrm>
+            <a:off x="0" y="0"/>
+            <a:ext cx="12192000" cy="6858000"/>
+          </a:xfrm>
+          <a:prstGeom prst="rect">
+            <a:avLst/>
+          </a:prstGeom>
+        </p:spPr>
+      </p:pic>
+    </p:spTree>
+  </p:cSld>
+  <p:clrMapOvr>
+    <a:masterClrMapping/>
+  </p:clrMapOvr>
+</p:sld>
+</file>
+
 <file path=ppt/slides/slide2.xml><?xml version="1.0" encoding="utf-8"?>
 <p:sld xmlns:a="http://schemas.openxmlformats.org/drawingml/2006/main" xmlns:p="http://schemas.openxmlformats.org/presentationml/2006/main" xmlns:r="http://schemas.openxmlformats.org/officeDocument/2006/relationships">
   <p:cSld>

--- a/fdi_pitch/India_Trade_FDI_Pitch_Deck.pptx
+++ b/fdi_pitch/India_Trade_FDI_Pitch_Deck.pptx
@@ -24,6 +24,7 @@
     <p:sldId id="272" r:id="rId23"/>
     <p:sldId id="273" r:id="rId24"/>
     <p:sldId id="274" r:id="rId25"/>
+    <p:sldId id="275" r:id="rId26"/>
   </p:sldIdLst>
   <p:sldSz cx="12192000" cy="6858000" type="screen4x3"/>
   <p:notesSz cx="6858000" cy="9144000"/>
@@ -3600,6 +3601,48 @@
 </p:sld>
 </file>
 
+<file path=ppt/slides/slide20.xml><?xml version="1.0" encoding="utf-8"?>
+<p:sld xmlns:a="http://schemas.openxmlformats.org/drawingml/2006/main" xmlns:p="http://schemas.openxmlformats.org/presentationml/2006/main" xmlns:r="http://schemas.openxmlformats.org/officeDocument/2006/relationships">
+  <p:cSld>
+    <p:spTree>
+      <p:nvGrpSpPr>
+        <p:cNvPr id="1" name=""/>
+        <p:cNvGrpSpPr/>
+        <p:nvPr/>
+      </p:nvGrpSpPr>
+      <p:grpSpPr/>
+      <p:pic>
+        <p:nvPicPr>
+          <p:cNvPr id="2" name="Picture 1" descr="slide_20.png"/>
+          <p:cNvPicPr>
+            <a:picLocks noChangeAspect="1"/>
+          </p:cNvPicPr>
+          <p:nvPr/>
+        </p:nvPicPr>
+        <p:blipFill>
+          <a:blip r:embed="rId2"/>
+          <a:stretch>
+            <a:fillRect/>
+          </a:stretch>
+        </p:blipFill>
+        <p:spPr>
+          <a:xfrm>
+            <a:off x="0" y="0"/>
+            <a:ext cx="12192000" cy="6858000"/>
+          </a:xfrm>
+          <a:prstGeom prst="rect">
+            <a:avLst/>
+          </a:prstGeom>
+        </p:spPr>
+      </p:pic>
+    </p:spTree>
+  </p:cSld>
+  <p:clrMapOvr>
+    <a:masterClrMapping/>
+  </p:clrMapOvr>
+</p:sld>
+</file>
+
 <file path=ppt/slides/slide3.xml><?xml version="1.0" encoding="utf-8"?>
 <p:sld xmlns:a="http://schemas.openxmlformats.org/drawingml/2006/main" xmlns:p="http://schemas.openxmlformats.org/presentationml/2006/main" xmlns:r="http://schemas.openxmlformats.org/officeDocument/2006/relationships">
   <p:cSld>

--- a/fdi_pitch/India_Trade_FDI_Pitch_Deck.pptx
+++ b/fdi_pitch/India_Trade_FDI_Pitch_Deck.pptx
@@ -25,6 +25,7 @@
     <p:sldId id="273" r:id="rId24"/>
     <p:sldId id="274" r:id="rId25"/>
     <p:sldId id="275" r:id="rId26"/>
+    <p:sldId id="276" r:id="rId27"/>
   </p:sldIdLst>
   <p:sldSz cx="12192000" cy="6858000" type="screen4x3"/>
   <p:notesSz cx="6858000" cy="9144000"/>
@@ -3643,6 +3644,48 @@
 </p:sld>
 </file>
 
+<file path=ppt/slides/slide21.xml><?xml version="1.0" encoding="utf-8"?>
+<p:sld xmlns:a="http://schemas.openxmlformats.org/drawingml/2006/main" xmlns:p="http://schemas.openxmlformats.org/presentationml/2006/main" xmlns:r="http://schemas.openxmlformats.org/officeDocument/2006/relationships">
+  <p:cSld>
+    <p:spTree>
+      <p:nvGrpSpPr>
+        <p:cNvPr id="1" name=""/>
+        <p:cNvGrpSpPr/>
+        <p:nvPr/>
+      </p:nvGrpSpPr>
+      <p:grpSpPr/>
+      <p:pic>
+        <p:nvPicPr>
+          <p:cNvPr id="2" name="Picture 1" descr="slide_21.png"/>
+          <p:cNvPicPr>
+            <a:picLocks noChangeAspect="1"/>
+          </p:cNvPicPr>
+          <p:nvPr/>
+        </p:nvPicPr>
+        <p:blipFill>
+          <a:blip r:embed="rId2"/>
+          <a:stretch>
+            <a:fillRect/>
+          </a:stretch>
+        </p:blipFill>
+        <p:spPr>
+          <a:xfrm>
+            <a:off x="0" y="0"/>
+            <a:ext cx="12192000" cy="6858000"/>
+          </a:xfrm>
+          <a:prstGeom prst="rect">
+            <a:avLst/>
+          </a:prstGeom>
+        </p:spPr>
+      </p:pic>
+    </p:spTree>
+  </p:cSld>
+  <p:clrMapOvr>
+    <a:masterClrMapping/>
+  </p:clrMapOvr>
+</p:sld>
+</file>
+
 <file path=ppt/slides/slide3.xml><?xml version="1.0" encoding="utf-8"?>
 <p:sld xmlns:a="http://schemas.openxmlformats.org/drawingml/2006/main" xmlns:p="http://schemas.openxmlformats.org/presentationml/2006/main" xmlns:r="http://schemas.openxmlformats.org/officeDocument/2006/relationships">
   <p:cSld>

--- a/fdi_pitch/India_Trade_FDI_Pitch_Deck.pptx
+++ b/fdi_pitch/India_Trade_FDI_Pitch_Deck.pptx
@@ -26,6 +26,7 @@
     <p:sldId id="274" r:id="rId25"/>
     <p:sldId id="275" r:id="rId26"/>
     <p:sldId id="276" r:id="rId27"/>
+    <p:sldId id="277" r:id="rId28"/>
   </p:sldIdLst>
   <p:sldSz cx="12192000" cy="6858000" type="screen4x3"/>
   <p:notesSz cx="6858000" cy="9144000"/>
@@ -3657,6 +3658,48 @@
       <p:pic>
         <p:nvPicPr>
           <p:cNvPr id="2" name="Picture 1" descr="slide_21.png"/>
+          <p:cNvPicPr>
+            <a:picLocks noChangeAspect="1"/>
+          </p:cNvPicPr>
+          <p:nvPr/>
+        </p:nvPicPr>
+        <p:blipFill>
+          <a:blip r:embed="rId2"/>
+          <a:stretch>
+            <a:fillRect/>
+          </a:stretch>
+        </p:blipFill>
+        <p:spPr>
+          <a:xfrm>
+            <a:off x="0" y="0"/>
+            <a:ext cx="12192000" cy="6858000"/>
+          </a:xfrm>
+          <a:prstGeom prst="rect">
+            <a:avLst/>
+          </a:prstGeom>
+        </p:spPr>
+      </p:pic>
+    </p:spTree>
+  </p:cSld>
+  <p:clrMapOvr>
+    <a:masterClrMapping/>
+  </p:clrMapOvr>
+</p:sld>
+</file>
+
+<file path=ppt/slides/slide22.xml><?xml version="1.0" encoding="utf-8"?>
+<p:sld xmlns:a="http://schemas.openxmlformats.org/drawingml/2006/main" xmlns:p="http://schemas.openxmlformats.org/presentationml/2006/main" xmlns:r="http://schemas.openxmlformats.org/officeDocument/2006/relationships">
+  <p:cSld>
+    <p:spTree>
+      <p:nvGrpSpPr>
+        <p:cNvPr id="1" name=""/>
+        <p:cNvGrpSpPr/>
+        <p:nvPr/>
+      </p:nvGrpSpPr>
+      <p:grpSpPr/>
+      <p:pic>
+        <p:nvPicPr>
+          <p:cNvPr id="2" name="Picture 1" descr="slide_22.png"/>
           <p:cNvPicPr>
             <a:picLocks noChangeAspect="1"/>
           </p:cNvPicPr>

--- a/fdi_pitch/India_Trade_FDI_Pitch_Deck.pptx
+++ b/fdi_pitch/India_Trade_FDI_Pitch_Deck.pptx
@@ -27,6 +27,7 @@
     <p:sldId id="275" r:id="rId26"/>
     <p:sldId id="276" r:id="rId27"/>
     <p:sldId id="277" r:id="rId28"/>
+    <p:sldId id="278" r:id="rId29"/>
   </p:sldIdLst>
   <p:sldSz cx="12192000" cy="6858000" type="screen4x3"/>
   <p:notesSz cx="6858000" cy="9144000"/>
@@ -3700,6 +3701,48 @@
       <p:pic>
         <p:nvPicPr>
           <p:cNvPr id="2" name="Picture 1" descr="slide_22.png"/>
+          <p:cNvPicPr>
+            <a:picLocks noChangeAspect="1"/>
+          </p:cNvPicPr>
+          <p:nvPr/>
+        </p:nvPicPr>
+        <p:blipFill>
+          <a:blip r:embed="rId2"/>
+          <a:stretch>
+            <a:fillRect/>
+          </a:stretch>
+        </p:blipFill>
+        <p:spPr>
+          <a:xfrm>
+            <a:off x="0" y="0"/>
+            <a:ext cx="12192000" cy="6858000"/>
+          </a:xfrm>
+          <a:prstGeom prst="rect">
+            <a:avLst/>
+          </a:prstGeom>
+        </p:spPr>
+      </p:pic>
+    </p:spTree>
+  </p:cSld>
+  <p:clrMapOvr>
+    <a:masterClrMapping/>
+  </p:clrMapOvr>
+</p:sld>
+</file>
+
+<file path=ppt/slides/slide23.xml><?xml version="1.0" encoding="utf-8"?>
+<p:sld xmlns:a="http://schemas.openxmlformats.org/drawingml/2006/main" xmlns:p="http://schemas.openxmlformats.org/presentationml/2006/main" xmlns:r="http://schemas.openxmlformats.org/officeDocument/2006/relationships">
+  <p:cSld>
+    <p:spTree>
+      <p:nvGrpSpPr>
+        <p:cNvPr id="1" name=""/>
+        <p:cNvGrpSpPr/>
+        <p:nvPr/>
+      </p:nvGrpSpPr>
+      <p:grpSpPr/>
+      <p:pic>
+        <p:nvPicPr>
+          <p:cNvPr id="2" name="Picture 1" descr="slide_23.png"/>
           <p:cNvPicPr>
             <a:picLocks noChangeAspect="1"/>
           </p:cNvPicPr>
